--- a/docs/05_presentation/BMU_Verification_Presentation.pptx
+++ b/docs/05_presentation/BMU_Verification_Presentation.pptx
@@ -3156,8 +3156,8 @@
         </p:nvSpPr>
         <p:spPr>
           <a:xfrm>
-            <a:off x="9692640" y="2743200"/>
-            <a:ext cx="2103120" cy="2103120"/>
+            <a:off x="9601200" y="2743200"/>
+            <a:ext cx="2011680" cy="2011680"/>
           </a:xfrm>
           <a:prstGeom prst="ellipse">
             <a:avLst/>
@@ -3303,7 +3303,7 @@
           <a:noFill/>
         </p:spPr>
         <p:txBody>
-          <a:bodyPr wrap="square">
+          <a:bodyPr wrap="none">
             <a:spAutoFit/>
           </a:bodyPr>
           <a:lstStyle/>
@@ -3340,7 +3340,7 @@
         <p:spPr>
           <a:xfrm>
             <a:off x="822960" y="3200400"/>
-            <a:ext cx="2926080" cy="1371600"/>
+            <a:ext cx="2880360" cy="1463040"/>
           </a:xfrm>
           <a:prstGeom prst="roundRect">
             <a:avLst/>
@@ -3385,7 +3385,7 @@
         <p:spPr>
           <a:xfrm>
             <a:off x="987552" y="3310128"/>
-            <a:ext cx="2606040" cy="1188720"/>
+            <a:ext cx="2560320" cy="1280160"/>
           </a:xfrm>
           <a:prstGeom prst="rect">
             <a:avLst/>
@@ -3451,8 +3451,8 @@
         </p:nvSpPr>
         <p:spPr>
           <a:xfrm>
-            <a:off x="4023360" y="3200400"/>
-            <a:ext cx="2926080" cy="1371600"/>
+            <a:off x="3977639" y="3200400"/>
+            <a:ext cx="2880360" cy="1463040"/>
           </a:xfrm>
           <a:prstGeom prst="roundRect">
             <a:avLst/>
@@ -3496,8 +3496,8 @@
         </p:nvSpPr>
         <p:spPr>
           <a:xfrm>
-            <a:off x="4187952" y="3310128"/>
-            <a:ext cx="2606040" cy="1188720"/>
+            <a:off x="4142231" y="3310128"/>
+            <a:ext cx="2560320" cy="1280160"/>
           </a:xfrm>
           <a:prstGeom prst="rect">
             <a:avLst/>
@@ -3563,8 +3563,8 @@
         </p:nvSpPr>
         <p:spPr>
           <a:xfrm>
-            <a:off x="822960" y="4846320"/>
-            <a:ext cx="6126480" cy="1097280"/>
+            <a:off x="822960" y="4800600"/>
+            <a:ext cx="6035040" cy="1005840"/>
           </a:xfrm>
           <a:prstGeom prst="roundRect">
             <a:avLst/>
@@ -3608,8 +3608,8 @@
         </p:nvSpPr>
         <p:spPr>
           <a:xfrm>
-            <a:off x="987552" y="4956048"/>
-            <a:ext cx="5806440" cy="914400"/>
+            <a:off x="987552" y="4910328"/>
+            <a:ext cx="5715000" cy="822960"/>
           </a:xfrm>
           <a:prstGeom prst="rect">
             <a:avLst/>
@@ -3630,7 +3630,23 @@
                 </a:solidFill>
                 <a:latin typeface="Aptos"/>
               </a:rPr>
-              <a:t>Core message</a:t>
+              <a:t>Main message</a:t>
+            </a:r>
+          </a:p>
+          <a:p>
+            <a:pPr algn="l">
+              <a:spcAft>
+                <a:spcPts val="400"/>
+              </a:spcAft>
+            </a:pPr>
+            <a:r>
+              <a:rPr sz="1050">
+                <a:solidFill>
+                  <a:srgbClr val="59708B"/>
+                </a:solidFill>
+                <a:latin typeface="Aptos"/>
+              </a:rPr>
+              <a:t>Not just tests — a credible verification package.</a:t>
             </a:r>
           </a:p>
         </p:txBody>
@@ -3678,12 +3694,12 @@
           <a:p>
             <a:pPr algn="ctr"/>
             <a:r>
-              <a:rPr b="1" sz="1400">
+              <a:rPr b="1" sz="1300">
                 <a:solidFill>
                   <a:srgbClr val="2A333D"/>
                 </a:solidFill>
               </a:rPr>
-              <a:t>What I delivered</a:t>
+              <a:t>Actual project facts</a:t>
             </a:r>
           </a:p>
           <a:p>
@@ -3693,7 +3709,7 @@
                   <a:srgbClr val="59708B"/>
                 </a:solidFill>
               </a:rPr>
-              <a:t>UVM environment</a:t>
+              <a:t>8 open bug IDs</a:t>
             </a:r>
           </a:p>
           <a:p>
@@ -3703,7 +3719,7 @@
                   <a:srgbClr val="59708B"/>
                 </a:solidFill>
               </a:rPr>
-              <a:t>Real testbench</a:t>
+              <a:t>1 passed / 2 failed regression</a:t>
             </a:r>
           </a:p>
           <a:p>
@@ -3713,27 +3729,7 @@
                   <a:srgbClr val="59708B"/>
                 </a:solidFill>
               </a:rPr>
-              <a:t>Assertions</a:t>
-            </a:r>
-          </a:p>
-          <a:p>
-            <a:r>
-              <a:rPr sz="1100">
-                <a:solidFill>
-                  <a:srgbClr val="59708B"/>
-                </a:solidFill>
-              </a:rPr>
-              <a:t>Bug register</a:t>
-            </a:r>
-          </a:p>
-          <a:p>
-            <a:r>
-              <a:rPr sz="1100">
-                <a:solidFill>
-                  <a:srgbClr val="59708B"/>
-                </a:solidFill>
-              </a:rPr>
-              <a:t>CI checks</a:t>
+              <a:t>100% closure coverage</a:t>
             </a:r>
           </a:p>
         </p:txBody>
@@ -3901,7 +3897,7 @@
                 </a:solidFill>
                 <a:latin typeface="Aptos"/>
               </a:rPr>
-              <a:t>I can explain the verification flow, the bug logic, the CI checks, and the repo structure in under 10 minutes — while keeping it easy for non-experts to follow.</a:t>
+              <a:t>This project shows a real verification workflow: spec -&gt; test -&gt; compare -&gt; evidence -&gt; documented defects.</a:t>
             </a:r>
           </a:p>
         </p:txBody>
@@ -4005,7 +4001,7 @@
                 </a:solidFill>
                 <a:latin typeface="Aptos"/>
               </a:rPr>
-              <a:t>Project goal</a:t>
+              <a:t>What I accomplished</a:t>
             </a:r>
           </a:p>
         </p:txBody>
@@ -4019,7 +4015,7 @@
         <p:spPr>
           <a:xfrm>
             <a:off x="713232" y="1325880"/>
-            <a:ext cx="9875520" cy="548640"/>
+            <a:ext cx="9784080" cy="548640"/>
           </a:xfrm>
           <a:prstGeom prst="rect">
             <a:avLst/>
@@ -4034,13 +4030,13 @@
           <a:p>
             <a:pPr algn="l"/>
             <a:r>
-              <a:rPr sz="1300">
+              <a:rPr sz="1200">
                 <a:solidFill>
                   <a:srgbClr val="59708B"/>
                 </a:solidFill>
                 <a:latin typeface="Aptos"/>
               </a:rPr>
-              <a:t>What I was trying to prove and why it mattered</a:t>
+              <a:t>The project is not only about RTL; it is about verification discipline</a:t>
             </a:r>
           </a:p>
         </p:txBody>
@@ -4089,7 +4085,7 @@
         <p:spPr>
           <a:xfrm>
             <a:off x="731520" y="1737360"/>
-            <a:ext cx="5303520" cy="3291840"/>
+            <a:ext cx="5577840" cy="3474720"/>
           </a:xfrm>
           <a:prstGeom prst="roundRect">
             <a:avLst/>
@@ -4134,7 +4130,7 @@
         <p:spPr>
           <a:xfrm>
             <a:off x="896112" y="1847088"/>
-            <a:ext cx="5029200" cy="3154680"/>
+            <a:ext cx="5303520" cy="3337560"/>
           </a:xfrm>
           <a:prstGeom prst="rect">
             <a:avLst/>
@@ -4153,13 +4149,13 @@
               </a:spcAft>
             </a:pPr>
             <a:r>
-              <a:rPr sz="1200">
+              <a:rPr sz="1150">
                 <a:solidFill>
                   <a:srgbClr val="2A333D"/>
                 </a:solidFill>
                 <a:latin typeface="Aptos"/>
               </a:rPr>
-              <a:t>Validate the delivered BMU RTL against the spec.</a:t>
+              <a:t>Built a UVM verification environment in tb/ for the BMU DUT.</a:t>
             </a:r>
           </a:p>
           <a:p>
@@ -4169,13 +4165,13 @@
               </a:spcAft>
             </a:pPr>
             <a:r>
-              <a:rPr sz="1200">
+              <a:rPr sz="1150">
                 <a:solidFill>
                   <a:srgbClr val="2A333D"/>
                 </a:solidFill>
                 <a:latin typeface="Aptos"/>
               </a:rPr>
-              <a:t>Build a verification environment that checks the DUT independently.</a:t>
+              <a:t>Created directed and random tests for valid, invalid, corner, and guard cases.</a:t>
             </a:r>
           </a:p>
           <a:p>
@@ -4185,13 +4181,13 @@
               </a:spcAft>
             </a:pPr>
             <a:r>
-              <a:rPr sz="1200">
+              <a:rPr sz="1150">
                 <a:solidFill>
                   <a:srgbClr val="2A333D"/>
                 </a:solidFill>
                 <a:latin typeface="Aptos"/>
               </a:rPr>
-              <a:t>Capture real defects with traceable evidence instead of assumptions.</a:t>
+              <a:t>Added protocol assertions to check reset, validity, and illegal-control behavior.</a:t>
             </a:r>
           </a:p>
           <a:p>
@@ -4201,13 +4197,13 @@
               </a:spcAft>
             </a:pPr>
             <a:r>
-              <a:rPr sz="1200">
+              <a:rPr sz="1150">
                 <a:solidFill>
                   <a:srgbClr val="2A333D"/>
                 </a:solidFill>
                 <a:latin typeface="Aptos"/>
               </a:rPr>
-              <a:t>Keep the original RTL intact and separate the fix investigation clearly.</a:t>
+              <a:t>Captured real bug evidence in the bug register and kept the original DUT untouched.</a:t>
             </a:r>
           </a:p>
           <a:p>
@@ -4217,13 +4213,13 @@
               </a:spcAft>
             </a:pPr>
             <a:r>
-              <a:rPr sz="1200">
+              <a:rPr sz="1150">
                 <a:solidFill>
                   <a:srgbClr val="2A333D"/>
                 </a:solidFill>
                 <a:latin typeface="Aptos"/>
               </a:rPr>
-              <a:t>Turn the repo into a portfolio-ready, professional engineering package.</a:t>
+              <a:t>Kept the repo clean, structured, and traceable for a professional review.</a:t>
             </a:r>
           </a:p>
         </p:txBody>
@@ -4236,8 +4232,8 @@
         </p:nvSpPr>
         <p:spPr>
           <a:xfrm>
-            <a:off x="6492240" y="1828800"/>
-            <a:ext cx="4389120" cy="2103120"/>
+            <a:off x="6583680" y="1828800"/>
+            <a:ext cx="4297680" cy="1920240"/>
           </a:xfrm>
           <a:prstGeom prst="roundRect">
             <a:avLst/>
@@ -4281,8 +4277,8 @@
         </p:nvSpPr>
         <p:spPr>
           <a:xfrm>
-            <a:off x="6656832" y="1938528"/>
-            <a:ext cx="4069080" cy="1920240"/>
+            <a:off x="6748272" y="1938528"/>
+            <a:ext cx="3977640" cy="1737360"/>
           </a:xfrm>
           <a:prstGeom prst="rect">
             <a:avLst/>
@@ -4303,7 +4299,7 @@
                 </a:solidFill>
                 <a:latin typeface="Aptos"/>
               </a:rPr>
-              <a:t>Why this matters</a:t>
+              <a:t>Why it matters</a:t>
             </a:r>
           </a:p>
         </p:txBody>
@@ -4316,8 +4312,8 @@
         </p:nvSpPr>
         <p:spPr>
           <a:xfrm>
-            <a:off x="6675120" y="4480560"/>
-            <a:ext cx="4023360" cy="1280160"/>
+            <a:off x="6583680" y="4297680"/>
+            <a:ext cx="4297680" cy="1280160"/>
           </a:xfrm>
           <a:prstGeom prst="roundRect">
             <a:avLst/>
@@ -4361,8 +4357,8 @@
         </p:nvSpPr>
         <p:spPr>
           <a:xfrm>
-            <a:off x="6839712" y="4590288"/>
-            <a:ext cx="3703320" cy="1097280"/>
+            <a:off x="6748272" y="4407408"/>
+            <a:ext cx="3977640" cy="1097280"/>
           </a:xfrm>
           <a:prstGeom prst="rect">
             <a:avLst/>
@@ -4383,7 +4379,7 @@
                 </a:solidFill>
                 <a:latin typeface="Aptos"/>
               </a:rPr>
-              <a:t>My contribution</a:t>
+              <a:t>Evidence-based stance</a:t>
             </a:r>
           </a:p>
         </p:txBody>
@@ -4501,7 +4497,7 @@
         <p:spPr>
           <a:xfrm>
             <a:off x="713232" y="1325880"/>
-            <a:ext cx="9875520" cy="548640"/>
+            <a:ext cx="9784080" cy="548640"/>
           </a:xfrm>
           <a:prstGeom prst="rect">
             <a:avLst/>
@@ -4516,13 +4512,13 @@
           <a:p>
             <a:pPr algn="l"/>
             <a:r>
-              <a:rPr sz="1300">
+              <a:rPr sz="1200">
                 <a:solidFill>
                   <a:srgbClr val="59708B"/>
                 </a:solidFill>
                 <a:latin typeface="Aptos"/>
               </a:rPr>
-              <a:t>From stimulus to scoreboard to bug evidence</a:t>
+              <a:t>Spec-driven flow with independent reference checking</a:t>
             </a:r>
           </a:p>
         </p:txBody>
@@ -4570,8 +4566,8 @@
         </p:nvSpPr>
         <p:spPr>
           <a:xfrm>
-            <a:off x="822960" y="2103120"/>
-            <a:ext cx="2011680" cy="1371600"/>
+            <a:off x="731520" y="2286000"/>
+            <a:ext cx="2011680" cy="1280160"/>
           </a:xfrm>
           <a:prstGeom prst="roundRect">
             <a:avLst/>
@@ -4605,12 +4601,13 @@
           <a:p>
             <a:pPr algn="ctr"/>
             <a:r>
-              <a:rPr sz="1200" b="1">
+              <a:rPr b="1" sz="1200">
                 <a:solidFill>
                   <a:srgbClr val="2A333D"/>
                 </a:solidFill>
-              </a:rPr>
-              <a:t>Spec + clarifications</a:t>
+                <a:latin typeface="Aptos"/>
+              </a:rPr>
+              <a:t>Spec &amp; clarification log</a:t>
             </a:r>
           </a:p>
         </p:txBody>
@@ -4623,8 +4620,8 @@
         </p:nvSpPr>
         <p:spPr>
           <a:xfrm>
-            <a:off x="3200400" y="2103120"/>
-            <a:ext cx="2011680" cy="1371600"/>
+            <a:off x="3017520" y="2286000"/>
+            <a:ext cx="2011680" cy="1280160"/>
           </a:xfrm>
           <a:prstGeom prst="roundRect">
             <a:avLst/>
@@ -4658,10 +4655,11 @@
           <a:p>
             <a:pPr algn="ctr"/>
             <a:r>
-              <a:rPr sz="1200" b="1">
+              <a:rPr b="1" sz="1200">
                 <a:solidFill>
                   <a:srgbClr val="2A333D"/>
                 </a:solidFill>
+                <a:latin typeface="Aptos"/>
               </a:rPr>
               <a:t>UVM testbench</a:t>
             </a:r>
@@ -4676,8 +4674,8 @@
         </p:nvSpPr>
         <p:spPr>
           <a:xfrm>
-            <a:off x="5577840" y="2103120"/>
-            <a:ext cx="2011680" cy="1371600"/>
+            <a:off x="5394960" y="2286000"/>
+            <a:ext cx="2011680" cy="1280160"/>
           </a:xfrm>
           <a:prstGeom prst="roundRect">
             <a:avLst/>
@@ -4711,10 +4709,11 @@
           <a:p>
             <a:pPr algn="ctr"/>
             <a:r>
-              <a:rPr sz="1200" b="1">
+              <a:rPr b="1" sz="1200">
                 <a:solidFill>
                   <a:srgbClr val="2A333D"/>
                 </a:solidFill>
+                <a:latin typeface="Aptos"/>
               </a:rPr>
               <a:t>Reference model</a:t>
             </a:r>
@@ -4729,8 +4728,8 @@
         </p:nvSpPr>
         <p:spPr>
           <a:xfrm>
-            <a:off x="7955279" y="2103120"/>
-            <a:ext cx="2011680" cy="1371600"/>
+            <a:off x="7772400" y="2286000"/>
+            <a:ext cx="2011680" cy="1280160"/>
           </a:xfrm>
           <a:prstGeom prst="roundRect">
             <a:avLst/>
@@ -4764,12 +4763,13 @@
           <a:p>
             <a:pPr algn="ctr"/>
             <a:r>
-              <a:rPr sz="1200" b="1">
+              <a:rPr b="1" sz="1200">
                 <a:solidFill>
                   <a:srgbClr val="2A333D"/>
                 </a:solidFill>
-              </a:rPr>
-              <a:t>Scoreboard / assertions</a:t>
+                <a:latin typeface="Aptos"/>
+              </a:rPr>
+              <a:t>Scoreboard + assertions</a:t>
             </a:r>
           </a:p>
         </p:txBody>
@@ -4782,8 +4782,8 @@
         </p:nvSpPr>
         <p:spPr>
           <a:xfrm>
-            <a:off x="2834640" y="2651760"/>
-            <a:ext cx="822960" cy="228600"/>
+            <a:off x="2743200" y="2743200"/>
+            <a:ext cx="640080" cy="228600"/>
           </a:xfrm>
           <a:prstGeom prst="rightArrow">
             <a:avLst/>
@@ -4825,8 +4825,8 @@
         </p:nvSpPr>
         <p:spPr>
           <a:xfrm>
-            <a:off x="5212080" y="2651760"/>
-            <a:ext cx="822960" cy="228600"/>
+            <a:off x="5120640" y="2743200"/>
+            <a:ext cx="640080" cy="228600"/>
           </a:xfrm>
           <a:prstGeom prst="rightArrow">
             <a:avLst/>
@@ -4868,8 +4868,8 @@
         </p:nvSpPr>
         <p:spPr>
           <a:xfrm>
-            <a:off x="7589520" y="2651760"/>
-            <a:ext cx="822960" cy="228600"/>
+            <a:off x="7498079" y="2743200"/>
+            <a:ext cx="640080" cy="228600"/>
           </a:xfrm>
           <a:prstGeom prst="rightArrow">
             <a:avLst/>
@@ -4911,8 +4911,8 @@
         </p:nvSpPr>
         <p:spPr>
           <a:xfrm>
-            <a:off x="1005840" y="4389120"/>
-            <a:ext cx="4572000" cy="1371600"/>
+            <a:off x="914400" y="4389120"/>
+            <a:ext cx="5029200" cy="1280160"/>
           </a:xfrm>
           <a:prstGeom prst="roundRect">
             <a:avLst/>
@@ -4956,8 +4956,8 @@
         </p:nvSpPr>
         <p:spPr>
           <a:xfrm>
-            <a:off x="1170432" y="4498848"/>
-            <a:ext cx="4251960" cy="1188720"/>
+            <a:off x="1078992" y="4498848"/>
+            <a:ext cx="4709160" cy="1097280"/>
           </a:xfrm>
           <a:prstGeom prst="rect">
             <a:avLst/>
@@ -4978,39 +4978,7 @@
                 </a:solidFill>
                 <a:latin typeface="Aptos"/>
               </a:rPr>
-              <a:t>What this gives us</a:t>
-            </a:r>
-          </a:p>
-          <a:p>
-            <a:pPr algn="l">
-              <a:spcAft>
-                <a:spcPts val="400"/>
-              </a:spcAft>
-            </a:pPr>
-            <a:r>
-              <a:rPr sz="1050">
-                <a:solidFill>
-                  <a:srgbClr val="59708B"/>
-                </a:solidFill>
-                <a:latin typeface="Aptos"/>
-              </a:rPr>
-              <a:t>Real mismatch detection</a:t>
-            </a:r>
-          </a:p>
-          <a:p>
-            <a:pPr algn="l">
-              <a:spcAft>
-                <a:spcPts val="400"/>
-              </a:spcAft>
-            </a:pPr>
-            <a:r>
-              <a:rPr sz="1050">
-                <a:solidFill>
-                  <a:srgbClr val="59708B"/>
-                </a:solidFill>
-                <a:latin typeface="Aptos"/>
-              </a:rPr>
-              <a:t>Traceable bug documentation</a:t>
+              <a:t>Why this is strong</a:t>
             </a:r>
           </a:p>
         </p:txBody>
@@ -5023,8 +4991,8 @@
         </p:nvSpPr>
         <p:spPr>
           <a:xfrm>
-            <a:off x="6126480" y="4389120"/>
-            <a:ext cx="4572000" cy="1371600"/>
+            <a:off x="6400800" y="4389120"/>
+            <a:ext cx="4389120" cy="1280160"/>
           </a:xfrm>
           <a:prstGeom prst="roundRect">
             <a:avLst/>
@@ -5068,8 +5036,8 @@
         </p:nvSpPr>
         <p:spPr>
           <a:xfrm>
-            <a:off x="6291072" y="4498848"/>
-            <a:ext cx="4251960" cy="1188720"/>
+            <a:off x="6565392" y="4498848"/>
+            <a:ext cx="4069080" cy="1097280"/>
           </a:xfrm>
           <a:prstGeom prst="rect">
             <a:avLst/>
@@ -5090,7 +5058,7 @@
                 </a:solidFill>
                 <a:latin typeface="Aptos"/>
               </a:rPr>
-              <a:t>What matters</a:t>
+              <a:t>Outcome</a:t>
             </a:r>
           </a:p>
         </p:txBody>
@@ -5194,7 +5162,7 @@
                 </a:solidFill>
                 <a:latin typeface="Aptos"/>
               </a:rPr>
-              <a:t>What I actually tested</a:t>
+              <a:t>Tests that actually exist</a:t>
             </a:r>
           </a:p>
         </p:txBody>
@@ -5208,7 +5176,7 @@
         <p:spPr>
           <a:xfrm>
             <a:off x="713232" y="1325880"/>
-            <a:ext cx="9875520" cy="548640"/>
+            <a:ext cx="9784080" cy="548640"/>
           </a:xfrm>
           <a:prstGeom prst="rect">
             <a:avLst/>
@@ -5223,13 +5191,13 @@
           <a:p>
             <a:pPr algn="l"/>
             <a:r>
-              <a:rPr sz="1300">
+              <a:rPr sz="1200">
                 <a:solidFill>
                   <a:srgbClr val="59708B"/>
                 </a:solidFill>
                 <a:latin typeface="Aptos"/>
               </a:rPr>
-              <a:t>The repo contains real verification flows, not placeholders</a:t>
+              <a:t>Real verification runs, not placeholders</a:t>
             </a:r>
           </a:p>
         </p:txBody>
@@ -5278,7 +5246,7 @@
         <p:spPr>
           <a:xfrm>
             <a:off x="731520" y="1737360"/>
-            <a:ext cx="5669280" cy="3566160"/>
+            <a:ext cx="5486400" cy="3474720"/>
           </a:xfrm>
           <a:prstGeom prst="roundRect">
             <a:avLst/>
@@ -5323,7 +5291,7 @@
         <p:spPr>
           <a:xfrm>
             <a:off x="896112" y="1847088"/>
-            <a:ext cx="5394960" cy="3429000"/>
+            <a:ext cx="5212080" cy="3337560"/>
           </a:xfrm>
           <a:prstGeom prst="rect">
             <a:avLst/>
@@ -5342,13 +5310,13 @@
               </a:spcAft>
             </a:pPr>
             <a:r>
-              <a:rPr sz="1200">
+              <a:rPr sz="1150">
                 <a:solidFill>
                   <a:srgbClr val="2A333D"/>
                 </a:solidFill>
                 <a:latin typeface="Aptos"/>
               </a:rPr>
-              <a:t>Directed tests: nominal and error conditions.</a:t>
+              <a:t>bmu_gap_checks_test: targeted bug reproduction and mismatch capture.</a:t>
             </a:r>
           </a:p>
           <a:p>
@@ -5358,13 +5326,13 @@
               </a:spcAft>
             </a:pPr>
             <a:r>
-              <a:rPr sz="1200">
+              <a:rPr sz="1150">
                 <a:solidFill>
                   <a:srgbClr val="2A333D"/>
                 </a:solidFill>
                 <a:latin typeface="Aptos"/>
               </a:rPr>
-              <a:t>Gap-check reproducer tests for known bug scenarios.</a:t>
+              <a:t>bmu_nominal_directed_test: valid-operation nominal validation.</a:t>
             </a:r>
           </a:p>
           <a:p>
@@ -5374,13 +5342,13 @@
               </a:spcAft>
             </a:pPr>
             <a:r>
-              <a:rPr sz="1200">
+              <a:rPr sz="1150">
                 <a:solidFill>
                   <a:srgbClr val="2A333D"/>
                 </a:solidFill>
                 <a:latin typeface="Aptos"/>
               </a:rPr>
-              <a:t>Corner and random legal/illegal sweeps.</a:t>
+              <a:t>bmu_error_directed_test: invalid-control and guard checks.</a:t>
             </a:r>
           </a:p>
           <a:p>
@@ -5390,13 +5358,13 @@
               </a:spcAft>
             </a:pPr>
             <a:r>
-              <a:rPr sz="1200">
+              <a:rPr sz="1150">
                 <a:solidFill>
                   <a:srgbClr val="2A333D"/>
                 </a:solidFill>
                 <a:latin typeface="Aptos"/>
               </a:rPr>
-              <a:t>Coverage-closure and regression-style runs.</a:t>
+              <a:t>bmu_legal_random_test and bmu_error_random_test: broad random legal/illegal sweeps.</a:t>
             </a:r>
           </a:p>
           <a:p>
@@ -5406,13 +5374,13 @@
               </a:spcAft>
             </a:pPr>
             <a:r>
-              <a:rPr sz="1200">
+              <a:rPr sz="1150">
                 <a:solidFill>
                   <a:srgbClr val="2A333D"/>
                 </a:solidFill>
                 <a:latin typeface="Aptos"/>
               </a:rPr>
-              <a:t>Examples: bmu_gap_checks_test, bmu_nominal_directed_test, bmu_error_directed_test, bmu_coverage_closure_test.</a:t>
+              <a:t>bmu_coverage_closure_test: coverage-focused closure run with seed 4.</a:t>
             </a:r>
           </a:p>
         </p:txBody>
@@ -5425,8 +5393,8 @@
         </p:nvSpPr>
         <p:spPr>
           <a:xfrm>
-            <a:off x="6675120" y="1920240"/>
-            <a:ext cx="4389120" cy="1920240"/>
+            <a:off x="6583680" y="1828800"/>
+            <a:ext cx="4389120" cy="1828800"/>
           </a:xfrm>
           <a:prstGeom prst="roundRect">
             <a:avLst/>
@@ -5470,8 +5438,8 @@
         </p:nvSpPr>
         <p:spPr>
           <a:xfrm>
-            <a:off x="6839712" y="2029968"/>
-            <a:ext cx="4069080" cy="1737360"/>
+            <a:off x="6748272" y="1938528"/>
+            <a:ext cx="4069080" cy="1645920"/>
           </a:xfrm>
           <a:prstGeom prst="rect">
             <a:avLst/>
@@ -5505,7 +5473,7 @@
         </p:nvSpPr>
         <p:spPr>
           <a:xfrm>
-            <a:off x="6675120" y="4389120"/>
+            <a:off x="6583680" y="4206240"/>
             <a:ext cx="4389120" cy="1280160"/>
           </a:xfrm>
           <a:prstGeom prst="roundRect">
@@ -5550,7 +5518,7 @@
         </p:nvSpPr>
         <p:spPr>
           <a:xfrm>
-            <a:off x="6839712" y="4498848"/>
+            <a:off x="6748272" y="4315968"/>
             <a:ext cx="4069080" cy="1097280"/>
           </a:xfrm>
           <a:prstGeom prst="rect">
@@ -5676,7 +5644,7 @@
                 </a:solidFill>
                 <a:latin typeface="Aptos"/>
               </a:rPr>
-              <a:t>Assertions and CI quality gates</a:t>
+              <a:t>Assertions and CI quality</a:t>
             </a:r>
           </a:p>
         </p:txBody>
@@ -5690,7 +5658,7 @@
         <p:spPr>
           <a:xfrm>
             <a:off x="713232" y="1325880"/>
-            <a:ext cx="9875520" cy="548640"/>
+            <a:ext cx="9784080" cy="548640"/>
           </a:xfrm>
           <a:prstGeom prst="rect">
             <a:avLst/>
@@ -5705,13 +5673,13 @@
           <a:p>
             <a:pPr algn="l"/>
             <a:r>
-              <a:rPr sz="1300">
+              <a:rPr sz="1200">
                 <a:solidFill>
                   <a:srgbClr val="59708B"/>
                 </a:solidFill>
                 <a:latin typeface="Aptos"/>
               </a:rPr>
-              <a:t>I made the repo more trustworthy, not just more complete</a:t>
+              <a:t>I improved the verification quality and repo discipline</a:t>
             </a:r>
           </a:p>
         </p:txBody>
@@ -5759,8 +5727,8 @@
         </p:nvSpPr>
         <p:spPr>
           <a:xfrm>
-            <a:off x="731520" y="1828800"/>
-            <a:ext cx="5120640" cy="3200400"/>
+            <a:off x="731520" y="1737360"/>
+            <a:ext cx="5120640" cy="3566160"/>
           </a:xfrm>
           <a:prstGeom prst="roundRect">
             <a:avLst/>
@@ -5804,8 +5772,8 @@
         </p:nvSpPr>
         <p:spPr>
           <a:xfrm>
-            <a:off x="896112" y="1938528"/>
-            <a:ext cx="4846320" cy="3063240"/>
+            <a:off x="896112" y="1847088"/>
+            <a:ext cx="4846320" cy="3429000"/>
           </a:xfrm>
           <a:prstGeom prst="rect">
             <a:avLst/>
@@ -5824,13 +5792,13 @@
               </a:spcAft>
             </a:pPr>
             <a:r>
-              <a:rPr sz="1200">
+              <a:rPr sz="1150">
                 <a:solidFill>
                   <a:srgbClr val="2A333D"/>
                 </a:solidFill>
                 <a:latin typeface="Aptos"/>
               </a:rPr>
-              <a:t>Assertions checked reset, valid gating, invalid control combinations, GREV rules, and co-requisite logic.</a:t>
+              <a:t>Assertions checked reset behavior, valid gating, GREV invalid encoding, and SUB co-requisites.</a:t>
             </a:r>
           </a:p>
           <a:p>
@@ -5840,13 +5808,13 @@
               </a:spcAft>
             </a:pPr>
             <a:r>
-              <a:rPr sz="1200">
+              <a:rPr sz="1150">
                 <a:solidFill>
                   <a:srgbClr val="2A333D"/>
                 </a:solidFill>
                 <a:latin typeface="Aptos"/>
               </a:rPr>
-              <a:t>These caught protocol-level mistakes even before scoreboard mismatch analysis.</a:t>
+              <a:t>The bug register documents issues such as invalid guard acceptance and CTZ mismatch.</a:t>
             </a:r>
           </a:p>
           <a:p>
@@ -5856,13 +5824,13 @@
               </a:spcAft>
             </a:pPr>
             <a:r>
-              <a:rPr sz="1200">
+              <a:rPr sz="1150">
                 <a:solidFill>
                   <a:srgbClr val="2A333D"/>
                 </a:solidFill>
                 <a:latin typeface="Aptos"/>
               </a:rPr>
-              <a:t>I also set up a CI guard for documentation quality and accidental RTL drift.</a:t>
+              <a:t>The CI docs check ran locally and returned: Documentation checks passed.</a:t>
             </a:r>
           </a:p>
           <a:p>
@@ -5872,29 +5840,13 @@
               </a:spcAft>
             </a:pPr>
             <a:r>
-              <a:rPr sz="1200">
+              <a:rPr sz="1150">
                 <a:solidFill>
                   <a:srgbClr val="2A333D"/>
                 </a:solidFill>
                 <a:latin typeface="Aptos"/>
               </a:rPr>
-              <a:t>The local check was: Documentation checks passed.</a:t>
-            </a:r>
-          </a:p>
-          <a:p>
-            <a:pPr algn="l">
-              <a:spcAft>
-                <a:spcPts val="600"/>
-              </a:spcAft>
-            </a:pPr>
-            <a:r>
-              <a:rPr sz="1200">
-                <a:solidFill>
-                  <a:srgbClr val="2A333D"/>
-                </a:solidFill>
-                <a:latin typeface="Aptos"/>
-              </a:rPr>
-              <a:t>That means the repo is not just a dump of files — it is a disciplined verification package.</a:t>
+              <a:t>The guard also rejects unapproved RTL drift under rtl/ beyond the approved list.</a:t>
             </a:r>
           </a:p>
         </p:txBody>
@@ -5907,8 +5859,8 @@
         </p:nvSpPr>
         <p:spPr>
           <a:xfrm>
-            <a:off x="6492240" y="1920240"/>
-            <a:ext cx="4389120" cy="1554480"/>
+            <a:off x="6400800" y="1828800"/>
+            <a:ext cx="4389120" cy="1645920"/>
           </a:xfrm>
           <a:prstGeom prst="roundRect">
             <a:avLst/>
@@ -5952,8 +5904,8 @@
         </p:nvSpPr>
         <p:spPr>
           <a:xfrm>
-            <a:off x="6656832" y="2029968"/>
-            <a:ext cx="4069080" cy="1371600"/>
+            <a:off x="6565392" y="1938528"/>
+            <a:ext cx="4069080" cy="1463040"/>
           </a:xfrm>
           <a:prstGeom prst="rect">
             <a:avLst/>
@@ -5990,7 +5942,7 @@
                 </a:solidFill>
                 <a:latin typeface="Aptos"/>
               </a:rPr>
-              <a:t>Markdown lint: 0 issues</a:t>
+              <a:t>Documentation checks passed</a:t>
             </a:r>
           </a:p>
           <a:p>
@@ -6019,8 +5971,8 @@
         </p:nvSpPr>
         <p:spPr>
           <a:xfrm>
-            <a:off x="6492240" y="4023360"/>
-            <a:ext cx="4389120" cy="1463040"/>
+            <a:off x="6400800" y="4023360"/>
+            <a:ext cx="4389120" cy="1371600"/>
           </a:xfrm>
           <a:prstGeom prst="roundRect">
             <a:avLst/>
@@ -6064,8 +6016,8 @@
         </p:nvSpPr>
         <p:spPr>
           <a:xfrm>
-            <a:off x="6656832" y="4133088"/>
-            <a:ext cx="4069080" cy="1280160"/>
+            <a:off x="6565392" y="4133088"/>
+            <a:ext cx="4069080" cy="1188720"/>
           </a:xfrm>
           <a:prstGeom prst="rect">
             <a:avLst/>
@@ -6190,7 +6142,7 @@
                 </a:solidFill>
                 <a:latin typeface="Aptos"/>
               </a:rPr>
-              <a:t>Defects I found</a:t>
+              <a:t>Key defects I found</a:t>
             </a:r>
           </a:p>
         </p:txBody>
@@ -6204,7 +6156,7 @@
         <p:spPr>
           <a:xfrm>
             <a:off x="713232" y="1325880"/>
-            <a:ext cx="9875520" cy="548640"/>
+            <a:ext cx="9784080" cy="548640"/>
           </a:xfrm>
           <a:prstGeom prst="rect">
             <a:avLst/>
@@ -6219,13 +6171,13 @@
           <a:p>
             <a:pPr algn="l"/>
             <a:r>
-              <a:rPr sz="1300">
+              <a:rPr sz="1200">
                 <a:solidFill>
                   <a:srgbClr val="59708B"/>
                 </a:solidFill>
                 <a:latin typeface="Aptos"/>
               </a:rPr>
-              <a:t>The evidence was real, traceable, and open</a:t>
+              <a:t>These are real, traceable, and left Open</a:t>
             </a:r>
           </a:p>
         </p:txBody>
@@ -6273,8 +6225,8 @@
         </p:nvSpPr>
         <p:spPr>
           <a:xfrm>
-            <a:off x="731520" y="1645920"/>
-            <a:ext cx="2743200" cy="2560320"/>
+            <a:off x="640080" y="1645920"/>
+            <a:ext cx="2560320" cy="2468880"/>
           </a:xfrm>
           <a:prstGeom prst="roundRect">
             <a:avLst/>
@@ -6318,8 +6270,8 @@
         </p:nvSpPr>
         <p:spPr>
           <a:xfrm>
-            <a:off x="896112" y="1755648"/>
-            <a:ext cx="2423160" cy="2377440"/>
+            <a:off x="804672" y="1755648"/>
+            <a:ext cx="2240280" cy="2286000"/>
           </a:xfrm>
           <a:prstGeom prst="rect">
             <a:avLst/>
@@ -6369,8 +6321,8 @@
         </p:nvSpPr>
         <p:spPr>
           <a:xfrm>
-            <a:off x="3749039" y="1645920"/>
-            <a:ext cx="2560320" cy="2560320"/>
+            <a:off x="3566160" y="1645920"/>
+            <a:ext cx="2560320" cy="2468880"/>
           </a:xfrm>
           <a:prstGeom prst="roundRect">
             <a:avLst/>
@@ -6414,8 +6366,8 @@
         </p:nvSpPr>
         <p:spPr>
           <a:xfrm>
-            <a:off x="3913631" y="1755648"/>
-            <a:ext cx="2240280" cy="2377440"/>
+            <a:off x="3730752" y="1755648"/>
+            <a:ext cx="2240280" cy="2286000"/>
           </a:xfrm>
           <a:prstGeom prst="rect">
             <a:avLst/>
@@ -6465,8 +6417,8 @@
         </p:nvSpPr>
         <p:spPr>
           <a:xfrm>
-            <a:off x="6309360" y="1645920"/>
-            <a:ext cx="2560320" cy="2560320"/>
+            <a:off x="6492240" y="1645920"/>
+            <a:ext cx="2560320" cy="2468880"/>
           </a:xfrm>
           <a:prstGeom prst="roundRect">
             <a:avLst/>
@@ -6510,8 +6462,8 @@
         </p:nvSpPr>
         <p:spPr>
           <a:xfrm>
-            <a:off x="6473952" y="1755648"/>
-            <a:ext cx="2240280" cy="2377440"/>
+            <a:off x="6656832" y="1755648"/>
+            <a:ext cx="2240280" cy="2286000"/>
           </a:xfrm>
           <a:prstGeom prst="rect">
             <a:avLst/>
@@ -6545,8 +6497,8 @@
         </p:nvSpPr>
         <p:spPr>
           <a:xfrm>
-            <a:off x="8869680" y="1645920"/>
-            <a:ext cx="2560320" cy="2560320"/>
+            <a:off x="9418320" y="1645920"/>
+            <a:ext cx="1828800" cy="2468880"/>
           </a:xfrm>
           <a:prstGeom prst="roundRect">
             <a:avLst/>
@@ -6590,8 +6542,8 @@
         </p:nvSpPr>
         <p:spPr>
           <a:xfrm>
-            <a:off x="9034272" y="1755648"/>
-            <a:ext cx="2240280" cy="2377440"/>
+            <a:off x="9582912" y="1755648"/>
+            <a:ext cx="1508760" cy="2286000"/>
           </a:xfrm>
           <a:prstGeom prst="rect">
             <a:avLst/>
@@ -6625,8 +6577,8 @@
         </p:nvSpPr>
         <p:spPr>
           <a:xfrm>
-            <a:off x="1828800" y="4572000"/>
-            <a:ext cx="8046720" cy="1097280"/>
+            <a:off x="2011680" y="4572000"/>
+            <a:ext cx="7863840" cy="1097280"/>
           </a:xfrm>
           <a:prstGeom prst="roundRect">
             <a:avLst/>
@@ -6670,8 +6622,8 @@
         </p:nvSpPr>
         <p:spPr>
           <a:xfrm>
-            <a:off x="1993392" y="4681728"/>
-            <a:ext cx="7726680" cy="914400"/>
+            <a:off x="2176272" y="4681728"/>
+            <a:ext cx="7543800" cy="914400"/>
           </a:xfrm>
           <a:prstGeom prst="rect">
             <a:avLst/>
@@ -6692,7 +6644,7 @@
                 </a:solidFill>
                 <a:latin typeface="Aptos"/>
               </a:rPr>
-              <a:t>Bug log status</a:t>
+              <a:t>Status</a:t>
             </a:r>
           </a:p>
         </p:txBody>
@@ -6796,7 +6748,7 @@
                 </a:solidFill>
                 <a:latin typeface="Aptos"/>
               </a:rPr>
-              <a:t>Evidence and outputs</a:t>
+              <a:t>Measured results</a:t>
             </a:r>
           </a:p>
         </p:txBody>
@@ -6810,7 +6762,7 @@
         <p:spPr>
           <a:xfrm>
             <a:off x="713232" y="1325880"/>
-            <a:ext cx="9875520" cy="548640"/>
+            <a:ext cx="9784080" cy="548640"/>
           </a:xfrm>
           <a:prstGeom prst="rect">
             <a:avLst/>
@@ -6825,13 +6777,13 @@
           <a:p>
             <a:pPr algn="l"/>
             <a:r>
-              <a:rPr sz="1300">
+              <a:rPr sz="1200">
                 <a:solidFill>
                   <a:srgbClr val="59708B"/>
                 </a:solidFill>
                 <a:latin typeface="Aptos"/>
               </a:rPr>
-              <a:t>Numbers and logs I used to support the story</a:t>
+              <a:t>These numbers come from the project logs and coverage reports</a:t>
             </a:r>
           </a:p>
         </p:txBody>
@@ -6879,8 +6831,8 @@
         </p:nvSpPr>
         <p:spPr>
           <a:xfrm>
-            <a:off x="822960" y="1828800"/>
-            <a:ext cx="2926080" cy="2103120"/>
+            <a:off x="731520" y="1828800"/>
+            <a:ext cx="2926080" cy="2011680"/>
           </a:xfrm>
           <a:prstGeom prst="roundRect">
             <a:avLst/>
@@ -6924,8 +6876,8 @@
         </p:nvSpPr>
         <p:spPr>
           <a:xfrm>
-            <a:off x="987552" y="1938528"/>
-            <a:ext cx="2606040" cy="1920240"/>
+            <a:off x="896112" y="1938528"/>
+            <a:ext cx="2606040" cy="1828800"/>
           </a:xfrm>
           <a:prstGeom prst="rect">
             <a:avLst/>
@@ -6991,8 +6943,8 @@
         </p:nvSpPr>
         <p:spPr>
           <a:xfrm>
-            <a:off x="4114800" y="1828800"/>
-            <a:ext cx="2834640" cy="2103120"/>
+            <a:off x="3931920" y="1828800"/>
+            <a:ext cx="2743200" cy="2011680"/>
           </a:xfrm>
           <a:prstGeom prst="roundRect">
             <a:avLst/>
@@ -7036,8 +6988,8 @@
         </p:nvSpPr>
         <p:spPr>
           <a:xfrm>
-            <a:off x="4279392" y="1938528"/>
-            <a:ext cx="2514600" cy="1920240"/>
+            <a:off x="4096512" y="1938528"/>
+            <a:ext cx="2423160" cy="1828800"/>
           </a:xfrm>
           <a:prstGeom prst="rect">
             <a:avLst/>
@@ -7058,7 +7010,7 @@
                 </a:solidFill>
                 <a:latin typeface="Aptos"/>
               </a:rPr>
-              <a:t>Gap check run</a:t>
+              <a:t>Gap check</a:t>
             </a:r>
           </a:p>
           <a:p>
@@ -7074,7 +7026,7 @@
                 </a:solidFill>
                 <a:latin typeface="Aptos"/>
               </a:rPr>
-              <a:t>real DUT behavior captured in logs</a:t>
+              <a:t>63.32% functional coverage</a:t>
             </a:r>
           </a:p>
         </p:txBody>
@@ -7087,8 +7039,8 @@
         </p:nvSpPr>
         <p:spPr>
           <a:xfrm>
-            <a:off x="7315200" y="1828800"/>
-            <a:ext cx="3840480" cy="2103120"/>
+            <a:off x="7040880" y="1828800"/>
+            <a:ext cx="3931920" cy="2011680"/>
           </a:xfrm>
           <a:prstGeom prst="roundRect">
             <a:avLst/>
@@ -7132,8 +7084,8 @@
         </p:nvSpPr>
         <p:spPr>
           <a:xfrm>
-            <a:off x="7479792" y="1938528"/>
-            <a:ext cx="3520440" cy="1920240"/>
+            <a:off x="7205472" y="1938528"/>
+            <a:ext cx="3611880" cy="1828800"/>
           </a:xfrm>
           <a:prstGeom prst="rect">
             <a:avLst/>
@@ -7154,7 +7106,7 @@
                 </a:solidFill>
                 <a:latin typeface="Aptos"/>
               </a:rPr>
-              <a:t>Coverage snapshot</a:t>
+              <a:t>Closure run</a:t>
             </a:r>
           </a:p>
           <a:p>
@@ -7170,7 +7122,7 @@
                 </a:solidFill>
                 <a:latin typeface="Aptos"/>
               </a:rPr>
-              <a:t>63.32%</a:t>
+              <a:t>100.00% functional coverage</a:t>
             </a:r>
           </a:p>
           <a:p>
@@ -7186,23 +7138,7 @@
                 </a:solidFill>
                 <a:latin typeface="Aptos"/>
               </a:rPr>
-              <a:t>bmu_coverage_closure_test_4</a:t>
-            </a:r>
-          </a:p>
-          <a:p>
-            <a:pPr algn="l">
-              <a:spcAft>
-                <a:spcPts val="400"/>
-              </a:spcAft>
-            </a:pPr>
-            <a:r>
-              <a:rPr sz="1050">
-                <a:solidFill>
-                  <a:srgbClr val="59708B"/>
-                </a:solidFill>
-                <a:latin typeface="Aptos"/>
-              </a:rPr>
-              <a:t>100.00% functional coverage</a:t>
+              <a:t>seed 4</a:t>
             </a:r>
           </a:p>
         </p:txBody>
@@ -7215,8 +7151,8 @@
         </p:nvSpPr>
         <p:spPr>
           <a:xfrm>
-            <a:off x="1828800" y="4754880"/>
-            <a:ext cx="8229600" cy="1005840"/>
+            <a:off x="1463040" y="4572000"/>
+            <a:ext cx="8961120" cy="1005840"/>
           </a:xfrm>
           <a:prstGeom prst="roundRect">
             <a:avLst/>
@@ -7260,8 +7196,8 @@
         </p:nvSpPr>
         <p:spPr>
           <a:xfrm>
-            <a:off x="1993392" y="4864608"/>
-            <a:ext cx="7909560" cy="822960"/>
+            <a:off x="1627632" y="4681728"/>
+            <a:ext cx="8641080" cy="822960"/>
           </a:xfrm>
           <a:prstGeom prst="rect">
             <a:avLst/>
@@ -7282,7 +7218,7 @@
                 </a:solidFill>
                 <a:latin typeface="Aptos"/>
               </a:rPr>
-              <a:t>Professional statement</a:t>
+              <a:t>Professional interpretation</a:t>
             </a:r>
           </a:p>
         </p:txBody>
@@ -7386,7 +7322,7 @@
                 </a:solidFill>
                 <a:latin typeface="Aptos"/>
               </a:rPr>
-              <a:t>Extra work I completed</a:t>
+              <a:t>Repo structure and project polish</a:t>
             </a:r>
           </a:p>
         </p:txBody>
@@ -7400,7 +7336,7 @@
         <p:spPr>
           <a:xfrm>
             <a:off x="713232" y="1325880"/>
-            <a:ext cx="9875520" cy="548640"/>
+            <a:ext cx="9784080" cy="548640"/>
           </a:xfrm>
           <a:prstGeom prst="rect">
             <a:avLst/>
@@ -7415,13 +7351,13 @@
           <a:p>
             <a:pPr algn="l"/>
             <a:r>
-              <a:rPr sz="1300">
+              <a:rPr sz="1200">
                 <a:solidFill>
                   <a:srgbClr val="59708B"/>
                 </a:solidFill>
                 <a:latin typeface="Aptos"/>
               </a:rPr>
-              <a:t>Not just tests — full project hygiene and documentation</a:t>
+              <a:t>The work is organized for review, not just for code storage</a:t>
             </a:r>
           </a:p>
         </p:txBody>
@@ -7469,7 +7405,7 @@
         </p:nvSpPr>
         <p:spPr>
           <a:xfrm>
-            <a:off x="822960" y="1828800"/>
+            <a:off x="731520" y="1828800"/>
             <a:ext cx="5303520" cy="3383280"/>
           </a:xfrm>
           <a:prstGeom prst="roundRect">
@@ -7514,7 +7450,7 @@
         </p:nvSpPr>
         <p:spPr>
           <a:xfrm>
-            <a:off x="987552" y="1938528"/>
+            <a:off x="896112" y="1938528"/>
             <a:ext cx="5029200" cy="3246120"/>
           </a:xfrm>
           <a:prstGeom prst="rect">
@@ -7534,13 +7470,13 @@
               </a:spcAft>
             </a:pPr>
             <a:r>
-              <a:rPr sz="1200">
+              <a:rPr sz="1150">
                 <a:solidFill>
                   <a:srgbClr val="2A333D"/>
                 </a:solidFill>
                 <a:latin typeface="Aptos"/>
               </a:rPr>
-              <a:t>Separated original RTL from fix-version investigation files.</a:t>
+              <a:t>rtl/ contains the original RTL plus clearly isolated fix-version artifacts.</a:t>
             </a:r>
           </a:p>
           <a:p>
@@ -7550,13 +7486,13 @@
               </a:spcAft>
             </a:pPr>
             <a:r>
-              <a:rPr sz="1200">
+              <a:rPr sz="1150">
                 <a:solidFill>
                   <a:srgbClr val="2A333D"/>
                 </a:solidFill>
                 <a:latin typeface="Aptos"/>
               </a:rPr>
-              <a:t>Kept the original DUT untouched and clearly named the fix artifacts.</a:t>
+              <a:t>tb/ contains the UVM environment, interface, packages, assertions, and tests.</a:t>
             </a:r>
           </a:p>
           <a:p>
@@ -7566,13 +7502,13 @@
               </a:spcAft>
             </a:pPr>
             <a:r>
-              <a:rPr sz="1200">
+              <a:rPr sz="1150">
                 <a:solidFill>
                   <a:srgbClr val="2A333D"/>
                 </a:solidFill>
                 <a:latin typeface="Aptos"/>
               </a:rPr>
-              <a:t>Organized docs, bug records, coverage summaries, and signoff material in a clean structure.</a:t>
+              <a:t>docs/ holds the spec, verification plan, bug register, coverage, signoff, and presentation files.</a:t>
             </a:r>
           </a:p>
           <a:p>
@@ -7582,13 +7518,13 @@
               </a:spcAft>
             </a:pPr>
             <a:r>
-              <a:rPr sz="1200">
+              <a:rPr sz="1150">
                 <a:solidFill>
                   <a:srgbClr val="2A333D"/>
                 </a:solidFill>
                 <a:latin typeface="Aptos"/>
               </a:rPr>
-              <a:t>Created professional spreadsheet-style CSV deliverables for the test plan, verification plan, and bug log.</a:t>
+              <a:t>results/ stores simulator logs, coverage results, and bug evidence.</a:t>
             </a:r>
           </a:p>
           <a:p>
@@ -7598,13 +7534,13 @@
               </a:spcAft>
             </a:pPr>
             <a:r>
-              <a:rPr sz="1200">
+              <a:rPr sz="1150">
                 <a:solidFill>
                   <a:srgbClr val="2A333D"/>
                 </a:solidFill>
                 <a:latin typeface="Aptos"/>
               </a:rPr>
-              <a:t>Polished the repo README and kept the project presentation-ready.</a:t>
+              <a:t>The repo is structured to make the story easy to defend during review or presentation.</a:t>
             </a:r>
           </a:p>
         </p:txBody>
@@ -7617,8 +7553,8 @@
         </p:nvSpPr>
         <p:spPr>
           <a:xfrm>
-            <a:off x="6583680" y="1920240"/>
-            <a:ext cx="4297680" cy="2103120"/>
+            <a:off x="6492240" y="1920240"/>
+            <a:ext cx="4480560" cy="2194560"/>
           </a:xfrm>
           <a:prstGeom prst="roundRect">
             <a:avLst/>
@@ -7662,8 +7598,8 @@
         </p:nvSpPr>
         <p:spPr>
           <a:xfrm>
-            <a:off x="6748272" y="2029968"/>
-            <a:ext cx="3977640" cy="1920240"/>
+            <a:off x="6656832" y="2029968"/>
+            <a:ext cx="4160520" cy="2011680"/>
           </a:xfrm>
           <a:prstGeom prst="rect">
             <a:avLst/>
@@ -7684,7 +7620,7 @@
                 </a:solidFill>
                 <a:latin typeface="Aptos"/>
               </a:rPr>
-              <a:t>Repo care</a:t>
+              <a:t>Extra effort</a:t>
             </a:r>
           </a:p>
         </p:txBody>
@@ -7788,7 +7724,7 @@
                 </a:solidFill>
                 <a:latin typeface="Aptos"/>
               </a:rPr>
-              <a:t>Important takeaway</a:t>
+              <a:t>Final takeaway</a:t>
             </a:r>
           </a:p>
         </p:txBody>
@@ -7802,7 +7738,7 @@
         <p:spPr>
           <a:xfrm>
             <a:off x="713232" y="1325880"/>
-            <a:ext cx="9875520" cy="548640"/>
+            <a:ext cx="9784080" cy="548640"/>
           </a:xfrm>
           <a:prstGeom prst="rect">
             <a:avLst/>
@@ -7817,13 +7753,13 @@
           <a:p>
             <a:pPr algn="l"/>
             <a:r>
-              <a:rPr sz="1300">
+              <a:rPr sz="1200">
                 <a:solidFill>
                   <a:srgbClr val="59708B"/>
                 </a:solidFill>
                 <a:latin typeface="Aptos"/>
               </a:rPr>
-              <a:t>I built a complete verification package, not just a code snapshot</a:t>
+              <a:t>This is a complete verification story, not just a code assignment</a:t>
             </a:r>
           </a:p>
         </p:txBody>
@@ -7872,7 +7808,7 @@
         <p:spPr>
           <a:xfrm>
             <a:off x="914400" y="1828800"/>
-            <a:ext cx="5303520" cy="3474720"/>
+            <a:ext cx="5486400" cy="3383280"/>
           </a:xfrm>
           <a:prstGeom prst="roundRect">
             <a:avLst/>
@@ -7917,7 +7853,7 @@
         <p:spPr>
           <a:xfrm>
             <a:off x="1078992" y="1938528"/>
-            <a:ext cx="5029200" cy="3337560"/>
+            <a:ext cx="5212080" cy="3246120"/>
           </a:xfrm>
           <a:prstGeom prst="rect">
             <a:avLst/>
@@ -7936,13 +7872,13 @@
               </a:spcAft>
             </a:pPr>
             <a:r>
-              <a:rPr sz="1200">
+              <a:rPr sz="1150">
                 <a:solidFill>
                   <a:srgbClr val="2A333D"/>
                 </a:solidFill>
                 <a:latin typeface="Aptos"/>
               </a:rPr>
-              <a:t>The project shows a complete verification lifecycle.</a:t>
+              <a:t>I traced the DUT against the specification and the clarification log.</a:t>
             </a:r>
           </a:p>
           <a:p>
@@ -7952,13 +7888,13 @@
               </a:spcAft>
             </a:pPr>
             <a:r>
-              <a:rPr sz="1200">
+              <a:rPr sz="1150">
                 <a:solidFill>
                   <a:srgbClr val="2A333D"/>
                 </a:solidFill>
                 <a:latin typeface="Aptos"/>
               </a:rPr>
-              <a:t>I traced the DUT to the spec, built tests, added assertions, and captured the bug evidence.</a:t>
+              <a:t>I built the testbench, assertions, coverage flow, and evidence package.</a:t>
             </a:r>
           </a:p>
           <a:p>
@@ -7968,13 +7904,13 @@
               </a:spcAft>
             </a:pPr>
             <a:r>
-              <a:rPr sz="1200">
+              <a:rPr sz="1150">
                 <a:solidFill>
                   <a:srgbClr val="2A333D"/>
                 </a:solidFill>
                 <a:latin typeface="Aptos"/>
               </a:rPr>
-              <a:t>I also kept the fix investigation isolated, so the original delivered RTL remains honest and traceable.</a:t>
+              <a:t>I captured the defects honestly and kept the original RTL separate from the fix investigation.</a:t>
             </a:r>
           </a:p>
           <a:p>
@@ -7984,13 +7920,13 @@
               </a:spcAft>
             </a:pPr>
             <a:r>
-              <a:rPr sz="1200">
+              <a:rPr sz="1150">
                 <a:solidFill>
                   <a:srgbClr val="2A333D"/>
                 </a:solidFill>
                 <a:latin typeface="Aptos"/>
               </a:rPr>
-              <a:t>That is the kind of work professors expect to see in a serious verification project: clear thinking, evidence, and structure.</a:t>
+              <a:t>That is exactly the kind of engineering narrative professors want to hear: evidence, structure, and honesty.</a:t>
             </a:r>
           </a:p>
         </p:txBody>
@@ -8003,8 +7939,8 @@
         </p:nvSpPr>
         <p:spPr>
           <a:xfrm>
-            <a:off x="6675120" y="2011680"/>
-            <a:ext cx="4206240" cy="2743200"/>
+            <a:off x="6949440" y="1828800"/>
+            <a:ext cx="3749039" cy="2651760"/>
           </a:xfrm>
           <a:prstGeom prst="roundRect">
             <a:avLst/>
@@ -8048,8 +7984,8 @@
         </p:nvSpPr>
         <p:spPr>
           <a:xfrm>
-            <a:off x="6839712" y="2121408"/>
-            <a:ext cx="3886200" cy="2560320"/>
+            <a:off x="7114032" y="1938528"/>
+            <a:ext cx="3428999" cy="2468880"/>
           </a:xfrm>
           <a:prstGeom prst="rect">
             <a:avLst/>
@@ -8070,7 +8006,7 @@
                 </a:solidFill>
                 <a:latin typeface="Aptos"/>
               </a:rPr>
-              <a:t>When I present this</a:t>
+              <a:t>Presenter note</a:t>
             </a:r>
           </a:p>
         </p:txBody>
